--- a/ppt/MLOps04-ScikitLearn.pptx
+++ b/ppt/MLOps04-ScikitLearn.pptx
@@ -5,10 +5,10 @@
     <p:sldMasterId id="2147483653" r:id="rId1"/>
   </p:sldMasterIdLst>
   <p:notesMasterIdLst>
-    <p:notesMasterId r:id="rId21"/>
+    <p:notesMasterId r:id="rId18"/>
   </p:notesMasterIdLst>
   <p:handoutMasterIdLst>
-    <p:handoutMasterId r:id="rId22"/>
+    <p:handoutMasterId r:id="rId19"/>
   </p:handoutMasterIdLst>
   <p:sldIdLst>
     <p:sldId id="264" r:id="rId2"/>
@@ -27,9 +27,6 @@
     <p:sldId id="283" r:id="rId15"/>
     <p:sldId id="296" r:id="rId16"/>
     <p:sldId id="361" r:id="rId17"/>
-    <p:sldId id="269" r:id="rId18"/>
-    <p:sldId id="272" r:id="rId19"/>
-    <p:sldId id="275" r:id="rId20"/>
   </p:sldIdLst>
   <p:sldSz cx="9144000" cy="6858000" type="screen4x3"/>
   <p:notesSz cx="6648450" cy="9782175"/>
@@ -5115,483 +5112,6 @@
     <p:extLst>
       <p:ext uri="{BB962C8B-B14F-4D97-AF65-F5344CB8AC3E}">
         <p14:creationId xmlns:p14="http://schemas.microsoft.com/office/powerpoint/2010/main" val="4017057312"/>
-      </p:ext>
-    </p:extLst>
-  </p:cSld>
-  <p:clrMapOvr>
-    <a:masterClrMapping/>
-  </p:clrMapOvr>
-</p:sld>
-</file>
-
-<file path=ppt/slides/slide17.xml><?xml version="1.0" encoding="utf-8"?>
-<p:sld xmlns:a="http://schemas.openxmlformats.org/drawingml/2006/main" xmlns:r="http://schemas.openxmlformats.org/officeDocument/2006/relationships" xmlns:p="http://schemas.openxmlformats.org/presentationml/2006/main">
-  <p:cSld>
-    <p:spTree>
-      <p:nvGrpSpPr>
-        <p:cNvPr id="1" name=""/>
-        <p:cNvGrpSpPr/>
-        <p:nvPr/>
-      </p:nvGrpSpPr>
-      <p:grpSpPr>
-        <a:xfrm>
-          <a:off x="0" y="0"/>
-          <a:ext cx="0" cy="0"/>
-          <a:chOff x="0" y="0"/>
-          <a:chExt cx="0" cy="0"/>
-        </a:xfrm>
-      </p:grpSpPr>
-      <p:sp>
-        <p:nvSpPr>
-          <p:cNvPr id="2" name="Titre 1"/>
-          <p:cNvSpPr>
-            <a:spLocks noGrp="1"/>
-          </p:cNvSpPr>
-          <p:nvPr>
-            <p:ph type="title"/>
-          </p:nvPr>
-        </p:nvSpPr>
-        <p:spPr/>
-        <p:txBody>
-          <a:bodyPr/>
-          <a:lstStyle/>
-          <a:p>
-            <a:r>
-              <a:rPr lang="fr-FR" dirty="0"/>
-              <a:t>SVM</a:t>
-            </a:r>
-          </a:p>
-        </p:txBody>
-      </p:sp>
-      <p:sp>
-        <p:nvSpPr>
-          <p:cNvPr id="3" name="Espace réservé du contenu 2"/>
-          <p:cNvSpPr>
-            <a:spLocks noGrp="1"/>
-          </p:cNvSpPr>
-          <p:nvPr>
-            <p:ph idx="1"/>
-          </p:nvPr>
-        </p:nvSpPr>
-        <p:spPr/>
-        <p:txBody>
-          <a:bodyPr/>
-          <a:lstStyle/>
-          <a:p>
-            <a:r>
-              <a:rPr lang="fr-FR" dirty="0"/>
-              <a:t>Les machines à vecteurs de support sont un ensemble de techniques d'apprentissage supervisé destinées à résoudre des problèmes de discrimination</a:t>
-            </a:r>
-          </a:p>
-          <a:p>
-            <a:pPr lvl="1"/>
-            <a:r>
-              <a:rPr lang="fr-FR" dirty="0"/>
-              <a:t>Les SVM sont une généralisation des </a:t>
-            </a:r>
-            <a:r>
-              <a:rPr lang="fr-FR" dirty="0" err="1"/>
-              <a:t>classifieurs</a:t>
-            </a:r>
-            <a:r>
-              <a:rPr lang="fr-FR" dirty="0"/>
-              <a:t> linéaires.</a:t>
-            </a:r>
-          </a:p>
-          <a:p>
-            <a:pPr lvl="1"/>
-            <a:r>
-              <a:rPr lang="fr-FR" dirty="0"/>
-              <a:t>Date années 1990 à partir des considérations théoriques de Vladimir </a:t>
-            </a:r>
-            <a:r>
-              <a:rPr lang="fr-FR" dirty="0" err="1"/>
-              <a:t>Vapnik</a:t>
-            </a:r>
-            <a:r>
-              <a:rPr lang="fr-FR" dirty="0"/>
-              <a:t> sur le développement d'une théorie statistique de l'apprentissage : la théorie de </a:t>
-            </a:r>
-            <a:r>
-              <a:rPr lang="fr-FR" dirty="0" err="1"/>
-              <a:t>Vapnik-Chervonenkis</a:t>
-            </a:r>
-            <a:endParaRPr lang="fr-FR" dirty="0"/>
-          </a:p>
-        </p:txBody>
-      </p:sp>
-    </p:spTree>
-    <p:extLst>
-      <p:ext uri="{BB962C8B-B14F-4D97-AF65-F5344CB8AC3E}">
-        <p14:creationId xmlns:p14="http://schemas.microsoft.com/office/powerpoint/2010/main" val="2140709624"/>
-      </p:ext>
-    </p:extLst>
-  </p:cSld>
-  <p:clrMapOvr>
-    <a:masterClrMapping/>
-  </p:clrMapOvr>
-</p:sld>
-</file>
-
-<file path=ppt/slides/slide18.xml><?xml version="1.0" encoding="utf-8"?>
-<p:sld xmlns:a="http://schemas.openxmlformats.org/drawingml/2006/main" xmlns:r="http://schemas.openxmlformats.org/officeDocument/2006/relationships" xmlns:p="http://schemas.openxmlformats.org/presentationml/2006/main">
-  <p:cSld>
-    <p:spTree>
-      <p:nvGrpSpPr>
-        <p:cNvPr id="1" name=""/>
-        <p:cNvGrpSpPr/>
-        <p:nvPr/>
-      </p:nvGrpSpPr>
-      <p:grpSpPr>
-        <a:xfrm>
-          <a:off x="0" y="0"/>
-          <a:ext cx="0" cy="0"/>
-          <a:chOff x="0" y="0"/>
-          <a:chExt cx="0" cy="0"/>
-        </a:xfrm>
-      </p:grpSpPr>
-      <p:sp>
-        <p:nvSpPr>
-          <p:cNvPr id="2" name="Titre 1"/>
-          <p:cNvSpPr>
-            <a:spLocks noGrp="1"/>
-          </p:cNvSpPr>
-          <p:nvPr>
-            <p:ph type="title"/>
-          </p:nvPr>
-        </p:nvSpPr>
-        <p:spPr/>
-        <p:txBody>
-          <a:bodyPr/>
-          <a:lstStyle/>
-          <a:p>
-            <a:r>
-              <a:rPr lang="fr-FR" dirty="0"/>
-              <a:t>SVM</a:t>
-            </a:r>
-          </a:p>
-        </p:txBody>
-      </p:sp>
-      <p:sp>
-        <p:nvSpPr>
-          <p:cNvPr id="3" name="Espace réservé du contenu 2"/>
-          <p:cNvSpPr>
-            <a:spLocks noGrp="1"/>
-          </p:cNvSpPr>
-          <p:nvPr>
-            <p:ph idx="1"/>
-          </p:nvPr>
-        </p:nvSpPr>
-        <p:spPr/>
-        <p:txBody>
-          <a:bodyPr/>
-          <a:lstStyle/>
-          <a:p>
-            <a:r>
-              <a:rPr lang="fr-FR" dirty="0"/>
-              <a:t>SVC est </a:t>
-            </a:r>
-            <a:r>
-              <a:rPr lang="fr-FR"/>
-              <a:t>un classifier SVM</a:t>
-            </a:r>
-            <a:endParaRPr lang="fr-FR" dirty="0"/>
-          </a:p>
-          <a:p>
-            <a:pPr lvl="1"/>
-            <a:r>
-              <a:rPr lang="fr-FR" dirty="0" err="1"/>
-              <a:t>sklearn.svm.SVC</a:t>
-            </a:r>
-            <a:r>
-              <a:rPr lang="fr-FR" dirty="0"/>
-              <a:t>(C=1.0, </a:t>
-            </a:r>
-            <a:r>
-              <a:rPr lang="fr-FR" dirty="0" err="1"/>
-              <a:t>kernel</a:t>
-            </a:r>
-            <a:r>
-              <a:rPr lang="fr-FR" dirty="0"/>
-              <a:t>=’</a:t>
-            </a:r>
-            <a:r>
-              <a:rPr lang="fr-FR" dirty="0" err="1"/>
-              <a:t>rbf</a:t>
-            </a:r>
-            <a:r>
-              <a:rPr lang="fr-FR" dirty="0"/>
-              <a:t>’, </a:t>
-            </a:r>
-            <a:r>
-              <a:rPr lang="fr-FR" dirty="0" err="1"/>
-              <a:t>degree</a:t>
-            </a:r>
-            <a:r>
-              <a:rPr lang="fr-FR" dirty="0"/>
-              <a:t>=3, gamma=’auto’, coef0=0.0, </a:t>
-            </a:r>
-            <a:r>
-              <a:rPr lang="fr-FR" dirty="0" err="1"/>
-              <a:t>shrinking</a:t>
-            </a:r>
-            <a:r>
-              <a:rPr lang="fr-FR" dirty="0"/>
-              <a:t>=</a:t>
-            </a:r>
-            <a:r>
-              <a:rPr lang="fr-FR" dirty="0" err="1"/>
-              <a:t>True</a:t>
-            </a:r>
-            <a:r>
-              <a:rPr lang="fr-FR" dirty="0"/>
-              <a:t>, </a:t>
-            </a:r>
-            <a:r>
-              <a:rPr lang="fr-FR" dirty="0" err="1"/>
-              <a:t>probability</a:t>
-            </a:r>
-            <a:r>
-              <a:rPr lang="fr-FR" dirty="0"/>
-              <a:t>=False, </a:t>
-            </a:r>
-            <a:r>
-              <a:rPr lang="fr-FR" dirty="0" err="1"/>
-              <a:t>tol</a:t>
-            </a:r>
-            <a:r>
-              <a:rPr lang="fr-FR" dirty="0"/>
-              <a:t>=0.001, </a:t>
-            </a:r>
-            <a:r>
-              <a:rPr lang="fr-FR" dirty="0" err="1"/>
-              <a:t>cache_size</a:t>
-            </a:r>
-            <a:r>
-              <a:rPr lang="fr-FR" dirty="0"/>
-              <a:t>=200, </a:t>
-            </a:r>
-            <a:r>
-              <a:rPr lang="fr-FR" dirty="0" err="1"/>
-              <a:t>class_weight</a:t>
-            </a:r>
-            <a:r>
-              <a:rPr lang="fr-FR" dirty="0"/>
-              <a:t>=None, </a:t>
-            </a:r>
-            <a:r>
-              <a:rPr lang="fr-FR" dirty="0" err="1"/>
-              <a:t>verbose</a:t>
-            </a:r>
-            <a:r>
-              <a:rPr lang="fr-FR" dirty="0"/>
-              <a:t>=False, </a:t>
-            </a:r>
-            <a:r>
-              <a:rPr lang="fr-FR" dirty="0" err="1"/>
-              <a:t>max_iter</a:t>
-            </a:r>
-            <a:r>
-              <a:rPr lang="fr-FR" dirty="0"/>
-              <a:t>=-1, </a:t>
-            </a:r>
-            <a:r>
-              <a:rPr lang="fr-FR" dirty="0" err="1"/>
-              <a:t>decision_function_shape</a:t>
-            </a:r>
-            <a:r>
-              <a:rPr lang="fr-FR" dirty="0"/>
-              <a:t>=’</a:t>
-            </a:r>
-            <a:r>
-              <a:rPr lang="fr-FR" dirty="0" err="1"/>
-              <a:t>ovr</a:t>
-            </a:r>
-            <a:r>
-              <a:rPr lang="fr-FR" dirty="0"/>
-              <a:t>’, </a:t>
-            </a:r>
-            <a:r>
-              <a:rPr lang="fr-FR" dirty="0" err="1"/>
-              <a:t>random_state</a:t>
-            </a:r>
-            <a:r>
-              <a:rPr lang="fr-FR" dirty="0"/>
-              <a:t>=None)</a:t>
-            </a:r>
-          </a:p>
-          <a:p>
-            <a:r>
-              <a:rPr lang="fr-FR" dirty="0"/>
-              <a:t>Exemple</a:t>
-            </a:r>
-          </a:p>
-          <a:p>
-            <a:pPr lvl="1"/>
-            <a:r>
-              <a:rPr lang="fr-FR" dirty="0" err="1"/>
-              <a:t>svm</a:t>
-            </a:r>
-            <a:r>
-              <a:rPr lang="fr-FR" dirty="0"/>
-              <a:t> = </a:t>
-            </a:r>
-            <a:r>
-              <a:rPr lang="fr-FR" dirty="0" err="1"/>
-              <a:t>sk.svm.SVC</a:t>
-            </a:r>
-            <a:r>
-              <a:rPr lang="fr-FR" dirty="0"/>
-              <a:t>(C=0.1, </a:t>
-            </a:r>
-            <a:r>
-              <a:rPr lang="fr-FR" dirty="0" err="1"/>
-              <a:t>kernel</a:t>
-            </a:r>
-            <a:r>
-              <a:rPr lang="fr-FR" dirty="0"/>
-              <a:t>='</a:t>
-            </a:r>
-            <a:r>
-              <a:rPr lang="fr-FR" dirty="0" err="1"/>
-              <a:t>linear</a:t>
-            </a:r>
-            <a:r>
-              <a:rPr lang="fr-FR" dirty="0"/>
-              <a:t>')</a:t>
-            </a:r>
-          </a:p>
-        </p:txBody>
-      </p:sp>
-    </p:spTree>
-    <p:extLst>
-      <p:ext uri="{BB962C8B-B14F-4D97-AF65-F5344CB8AC3E}">
-        <p14:creationId xmlns:p14="http://schemas.microsoft.com/office/powerpoint/2010/main" val="1019517547"/>
-      </p:ext>
-    </p:extLst>
-  </p:cSld>
-  <p:clrMapOvr>
-    <a:masterClrMapping/>
-  </p:clrMapOvr>
-</p:sld>
-</file>
-
-<file path=ppt/slides/slide19.xml><?xml version="1.0" encoding="utf-8"?>
-<p:sld xmlns:a="http://schemas.openxmlformats.org/drawingml/2006/main" xmlns:r="http://schemas.openxmlformats.org/officeDocument/2006/relationships" xmlns:p="http://schemas.openxmlformats.org/presentationml/2006/main">
-  <p:cSld>
-    <p:spTree>
-      <p:nvGrpSpPr>
-        <p:cNvPr id="1" name=""/>
-        <p:cNvGrpSpPr/>
-        <p:nvPr/>
-      </p:nvGrpSpPr>
-      <p:grpSpPr>
-        <a:xfrm>
-          <a:off x="0" y="0"/>
-          <a:ext cx="0" cy="0"/>
-          <a:chOff x="0" y="0"/>
-          <a:chExt cx="0" cy="0"/>
-        </a:xfrm>
-      </p:grpSpPr>
-      <p:sp>
-        <p:nvSpPr>
-          <p:cNvPr id="2" name="Titre 1"/>
-          <p:cNvSpPr>
-            <a:spLocks noGrp="1"/>
-          </p:cNvSpPr>
-          <p:nvPr>
-            <p:ph type="title"/>
-          </p:nvPr>
-        </p:nvSpPr>
-        <p:spPr/>
-        <p:txBody>
-          <a:bodyPr/>
-          <a:lstStyle/>
-          <a:p>
-            <a:r>
-              <a:rPr lang="fr-FR" dirty="0" err="1"/>
-              <a:t>Kernel</a:t>
-            </a:r>
-            <a:endParaRPr lang="fr-FR" dirty="0"/>
-          </a:p>
-        </p:txBody>
-      </p:sp>
-      <p:pic>
-        <p:nvPicPr>
-          <p:cNvPr id="1026" name="Picture 2">
-            <a:extLst>
-              <a:ext uri="{FF2B5EF4-FFF2-40B4-BE49-F238E27FC236}">
-                <a16:creationId xmlns:a16="http://schemas.microsoft.com/office/drawing/2014/main" id="{89D6814B-F322-48D5-8F90-C756EF69D552}"/>
-              </a:ext>
-            </a:extLst>
-          </p:cNvPr>
-          <p:cNvPicPr>
-            <a:picLocks noChangeAspect="1" noChangeArrowheads="1"/>
-          </p:cNvPicPr>
-          <p:nvPr/>
-        </p:nvPicPr>
-        <p:blipFill>
-          <a:blip r:embed="rId2">
-            <a:extLst>
-              <a:ext uri="{28A0092B-C50C-407E-A947-70E740481C1C}">
-                <a14:useLocalDpi xmlns:a14="http://schemas.microsoft.com/office/drawing/2010/main" val="0"/>
-              </a:ext>
-            </a:extLst>
-          </a:blip>
-          <a:srcRect/>
-          <a:stretch>
-            <a:fillRect/>
-          </a:stretch>
-        </p:blipFill>
-        <p:spPr bwMode="auto">
-          <a:xfrm>
-            <a:off x="962137" y="1052736"/>
-            <a:ext cx="7200800" cy="5400600"/>
-          </a:xfrm>
-          <a:prstGeom prst="rect">
-            <a:avLst/>
-          </a:prstGeom>
-          <a:noFill/>
-          <a:extLst>
-            <a:ext uri="{909E8E84-426E-40DD-AFC4-6F175D3DCCD1}">
-              <a14:hiddenFill xmlns:a14="http://schemas.microsoft.com/office/drawing/2010/main">
-                <a:solidFill>
-                  <a:srgbClr val="FFFFFF"/>
-                </a:solidFill>
-              </a14:hiddenFill>
-            </a:ext>
-          </a:extLst>
-        </p:spPr>
-      </p:pic>
-      <p:sp>
-        <p:nvSpPr>
-          <p:cNvPr id="4" name="Espace réservé du contenu 3">
-            <a:extLst>
-              <a:ext uri="{FF2B5EF4-FFF2-40B4-BE49-F238E27FC236}">
-                <a16:creationId xmlns:a16="http://schemas.microsoft.com/office/drawing/2014/main" id="{74C360BA-A065-419E-8020-069C3EB00082}"/>
-              </a:ext>
-            </a:extLst>
-          </p:cNvPr>
-          <p:cNvSpPr>
-            <a:spLocks noGrp="1"/>
-          </p:cNvSpPr>
-          <p:nvPr>
-            <p:ph idx="1"/>
-          </p:nvPr>
-        </p:nvSpPr>
-        <p:spPr/>
-        <p:txBody>
-          <a:bodyPr/>
-          <a:lstStyle/>
-          <a:p>
-            <a:endParaRPr lang="fr-FR"/>
-          </a:p>
-        </p:txBody>
-      </p:sp>
-    </p:spTree>
-    <p:extLst>
-      <p:ext uri="{BB962C8B-B14F-4D97-AF65-F5344CB8AC3E}">
-        <p14:creationId xmlns:p14="http://schemas.microsoft.com/office/powerpoint/2010/main" val="2518764896"/>
       </p:ext>
     </p:extLst>
   </p:cSld>
